--- a/public/materialy/1L/7/Prezentace k hodinám/4. Šifrování, HTTPS, hash a zálohy.pptx
+++ b/public/materialy/1L/7/Prezentace k hodinám/4. Šifrování, HTTPS, hash a zálohy.pptx
@@ -548,7 +548,7 @@
           </a:p>
           <a:p xmlns:a="http://schemas.openxmlformats.org/drawingml/2006/main">
             <a:r>
-              <a:t>Soubory: Složka 04_integrita, PowerShell, digitální pracovní sešit</a:t>
+              <a:t>Soubory: Složka Podklady k aktivitám, PowerShell, digitální pracovní sešit</a:t>
             </a:r>
           </a:p>
           <a:p xmlns:a="http://schemas.openxmlformats.org/drawingml/2006/main">
@@ -808,7 +808,7 @@
           <a:lstStyle xmlns:a="http://schemas.openxmlformats.org/drawingml/2006/main"/>
           <a:p xmlns:a="http://schemas.openxmlformats.org/drawingml/2006/main">
             <a:r>
-              <a:t>Hlavní aktivita využívá: Složka 04_integrita, PowerShell, digitální pracovní sešit</a:t>
+              <a:t>Hlavní aktivita využívá: Složka Podklady k aktivitám, PowerShell, digitální pracovní sešit</a:t>
             </a:r>
           </a:p>
           <a:p xmlns:a="http://schemas.openxmlformats.org/drawingml/2006/main">
@@ -823,7 +823,7 @@
           </a:p>
           <a:p xmlns:a="http://schemas.openxmlformats.org/drawingml/2006/main">
             <a:r>
-              <a:t>31–39 min – Get-FileHash: Studenti porovnají SHA‑256 souborů projekt_A.txt a projekt_B.txt.</a:t>
+              <a:t>31–39 min – Get-FileHash: Studenti porovnají SHA‑256 souborů 4. Kontrola integrity - projekt A.txt a 4. Kontrola integrity - projekt B.txt.</a:t>
             </a:r>
           </a:p>
           <a:p xmlns:a="http://schemas.openxmlformats.org/drawingml/2006/main">
@@ -918,7 +918,7 @@
           </a:p>
           <a:p xmlns:a="http://schemas.openxmlformats.org/drawingml/2006/main">
             <a:r>
-              <a:t>Podpora: Příkaz poskytněte ke zkopírování: Get-FileHash .\projekt_A.txt -Algorithm SHA256.</a:t>
+              <a:t>Podpora: Příkaz poskytněte ke zkopírování: Get-FileHash .\4. Kontrola integrity - projekt A.txt -Algorithm SHA256.</a:t>
             </a:r>
           </a:p>
           <a:p xmlns:a="http://schemas.openxmlformats.org/drawingml/2006/main">
@@ -1083,7 +1083,7 @@
           </a:p>
           <a:p xmlns:a="http://schemas.openxmlformats.org/drawingml/2006/main">
             <a:r>
-              <a:t>Podpora: Příkaz poskytněte ke zkopírování: Get-FileHash .\projekt_A.txt -Algorithm SHA256.</a:t>
+              <a:t>Podpora: Příkaz poskytněte ke zkopírování: Get-FileHash .\4. Kontrola integrity - projekt A.txt -Algorithm SHA256.</a:t>
             </a:r>
           </a:p>
           <a:p xmlns:a="http://schemas.openxmlformats.org/drawingml/2006/main">
@@ -3679,7 +3679,7 @@
               </a:defRPr>
             </a:pPr>
             <a:r>
-              <a:t>Složka 04_integrita, PowerShell, digitální pracovní sešit</a:t>
+              <a:t>Složka Podklady k aktivitám, PowerShell, digitální pracovní sešit</a:t>
             </a:r>
           </a:p>
         </p:txBody>
@@ -4011,7 +4011,7 @@
               </a:defRPr>
             </a:pPr>
             <a:r>
-              <a:t>Spusť Get-FileHash pro projekt_A.txt a projekt_B.txt a porovnej výsledky.</a:t>
+              <a:t>Spusť Get-FileHash pro 4. Kontrola integrity - projekt A.txt a 4. Kontrola integrity - projekt B.txt a porovnej výsledky.</a:t>
             </a:r>
           </a:p>
         </p:txBody>

--- a/public/materialy/1L/7/Prezentace k hodinám/4. Šifrování, HTTPS, hash a zálohy.pptx
+++ b/public/materialy/1L/7/Prezentace k hodinám/4. Šifrování, HTTPS, hash a zálohy.pptx
@@ -558,7 +558,7 @@
           </a:p>
           <a:p xmlns:a="http://schemas.openxmlformats.org/drawingml/2006/main">
             <a:r>
-              <a:t>Před otevřením dalšího snímku stručně uveďte téma a nechte studenty připravit pracovní soubory.</a:t>
+              <a:t>Před otevřením dalšího snímku stručně uveď téma a nech studenty připravit pracovní soubory.</a:t>
             </a:r>
           </a:p>
         </p:txBody>
@@ -638,7 +638,7 @@
           </a:p>
           <a:p xmlns:a="http://schemas.openxmlformats.org/drawingml/2006/main">
             <a:r>
-              <a:t>Postup učitele: Nechte studenty přiřadit otevřený text, šifrovaný obsah a kontrolní otisk.</a:t>
+              <a:t>Postup učitele: Nech studenty přiřadit otevřený text, šifrovaný obsah a kontrolní otisk.</a:t>
             </a:r>
           </a:p>
           <a:p xmlns:a="http://schemas.openxmlformats.org/drawingml/2006/main">
@@ -648,7 +648,7 @@
           </a:p>
           <a:p xmlns:a="http://schemas.openxmlformats.org/drawingml/2006/main">
             <a:r>
-              <a:t>Neprozrazujte správnou odpověď. Cílem je zachytit počáteční úsudek, ke kterému se třída vrátí při reflexi.</a:t>
+              <a:t>Neprozrazuj správnou odpověď. Cílem je zachytit počáteční úsudek, ke kterému se třída vrátí při reflexi.</a:t>
             </a:r>
           </a:p>
         </p:txBody>
@@ -728,7 +728,7 @@
           </a:p>
           <a:p xmlns:a="http://schemas.openxmlformats.org/drawingml/2006/main">
             <a:r>
-              <a:t>Postup učitele: Odlište důvěrnost, integritu a dostupnost.</a:t>
+              <a:t>Postup učitele: Odliš důvěrnost, integritu a dostupnost.</a:t>
             </a:r>
           </a:p>
           <a:p xmlns:a="http://schemas.openxmlformats.org/drawingml/2006/main">
@@ -738,7 +738,7 @@
           </a:p>
           <a:p xmlns:a="http://schemas.openxmlformats.org/drawingml/2006/main">
             <a:r>
-              <a:t>Nechte studenty doplnit příklad ke každému bodu. Přechod k aktivitě proveďte otázkou: Jak tyto tři body použijeme na dnešní soubor?</a:t>
+              <a:t>Nech studenty doplnit příklad ke každému bodu. Přechod k aktivitě proveď otázkou: Jak tyto tři body použijeme na dnešní soubor?</a:t>
             </a:r>
           </a:p>
         </p:txBody>
@@ -813,12 +813,12 @@
           </a:p>
           <a:p xmlns:a="http://schemas.openxmlformats.org/drawingml/2006/main">
             <a:r>
-              <a:t>13–22 min – Model jednoduché šifry: Dvojice zašifrují a obnoví slovo; ihned vysvětlete slabost modelu.</a:t>
-            </a:r>
-          </a:p>
-          <a:p xmlns:a="http://schemas.openxmlformats.org/drawingml/2006/main">
-            <a:r>
-              <a:t>22–31 min – HTTPS: Oddělte zabezpečení spojení od důvěryhodnosti webu.</a:t>
+              <a:t>13–22 min – Model jednoduché šifry: Dvojice zašifrují a obnoví slovo; ihned vysvětli slabost modelu.</a:t>
+            </a:r>
+          </a:p>
+          <a:p xmlns:a="http://schemas.openxmlformats.org/drawingml/2006/main">
+            <a:r>
+              <a:t>22–31 min – HTTPS: Odděl zabezpečení spojení od důvěryhodnosti webu.</a:t>
             </a:r>
           </a:p>
           <a:p xmlns:a="http://schemas.openxmlformats.org/drawingml/2006/main">
@@ -828,7 +828,7 @@
           </a:p>
           <a:p xmlns:a="http://schemas.openxmlformats.org/drawingml/2006/main">
             <a:r>
-              <a:t>39–42 min – Plán záloh: Požadujte oddělené kopie a ověření obnovitelnosti.</a:t>
+              <a:t>39–42 min – Plán záloh: Požaduj oddělené kopie a ověření obnovitelnosti.</a:t>
             </a:r>
           </a:p>
           <a:p xmlns:a="http://schemas.openxmlformats.org/drawingml/2006/main">
@@ -838,7 +838,7 @@
           </a:p>
           <a:p xmlns:a="http://schemas.openxmlformats.org/drawingml/2006/main">
             <a:r>
-              <a:t>Během práce nepřebírejte myš za studenta. Pomáhejte otázkami z dalšího snímku a žádejte, aby každé rozhodnutí opřel o konkrétní znak nebo zdroj.</a:t>
+              <a:t>Během práce nepřebírej myš za studenta. Pomáhej otázkami z dalšího snímku a žádej, aby každé rozhodnutí opřel o konkrétní znak nebo zdroj.</a:t>
             </a:r>
           </a:p>
         </p:txBody>
@@ -918,7 +918,7 @@
           </a:p>
           <a:p xmlns:a="http://schemas.openxmlformats.org/drawingml/2006/main">
             <a:r>
-              <a:t>Podpora: Příkaz poskytněte ke zkopírování: Get-FileHash .\4. Kontrola integrity - projekt A.txt -Algorithm SHA256.</a:t>
+              <a:t>Podpora: Příkaz poskytni ke zkopírování: Get-FileHash .\4. Kontrola integrity - projekt A.txt -Algorithm SHA256.</a:t>
             </a:r>
           </a:p>
           <a:p xmlns:a="http://schemas.openxmlformats.org/drawingml/2006/main">
@@ -928,7 +928,7 @@
           </a:p>
           <a:p xmlns:a="http://schemas.openxmlformats.org/drawingml/2006/main">
             <a:r>
-              <a:t>Pro rychlou mezikontrolu nechte dvojice vyměnit výstup a označit jeden dobře doložený bod a jednu otázku, která ještě zůstává.</a:t>
+              <a:t>Pro rychlou mezikontrolu nech dvojice vyměnit výstup a označit jeden dobře doložený bod a jednu otázku, která ještě zůstává.</a:t>
             </a:r>
           </a:p>
         </p:txBody>
@@ -1003,12 +1003,12 @@
           </a:p>
           <a:p xmlns:a="http://schemas.openxmlformats.org/drawingml/2006/main">
             <a:r>
-              <a:t>Časté chyby a intervence: „Hash lze dešifrovat.“ → Vraťte se k rozdílu mezi vratnou transformací s klíčem a jednosměrným otiskem. | „Stejný název znamená stejný soubor.“ → Porovnávejte obsah pomocí hashe, nikoli pouze název, velikost nebo ikonu. | „Cloudová synchronizace je vždy záloha.“ → Synchronizace může přenést smazání či poškození; důležitá je historie verzí a oddělená kopie.</a:t>
-            </a:r>
-          </a:p>
-          <a:p xmlns:a="http://schemas.openxmlformats.org/drawingml/2006/main">
-            <a:r>
-              <a:t>Nečtěte celý klíč. Vyberte dva studentské postupy, které vedou k odlišným závěrům, a nechte třídu určit, který je lépe podložený.</a:t>
+              <a:t>Časté chyby a intervence: „Hash lze dešifrovat.“ → Vrať se k rozdílu mezi vratnou transformací s klíčem a jednosměrným otiskem. | „Stejný název znamená stejný soubor.“ → Porovnávej obsah pomocí hashe, nikoli pouze název, velikost nebo ikonu. | „Cloudová synchronizace je vždy záloha.“ → Synchronizace může přenést smazání či poškození; důležitá je historie verzí a oddělená kopie.</a:t>
+            </a:r>
+          </a:p>
+          <a:p xmlns:a="http://schemas.openxmlformats.org/drawingml/2006/main">
+            <a:r>
+              <a:t>Nečti celý klíč. Vyber dva studentské postupy, které vedou k odlišným závěrům, a nech třídu určit, který je lépe podložený.</a:t>
             </a:r>
           </a:p>
         </p:txBody>
@@ -1083,7 +1083,7 @@
           </a:p>
           <a:p xmlns:a="http://schemas.openxmlformats.org/drawingml/2006/main">
             <a:r>
-              <a:t>Podpora: Příkaz poskytněte ke zkopírování: Get-FileHash .\4. Kontrola integrity - projekt A.txt -Algorithm SHA256.</a:t>
+              <a:t>Podpora: Příkaz poskytni ke zkopírování: Get-FileHash .\4. Kontrola integrity - projekt A.txt -Algorithm SHA256.</a:t>
             </a:r>
           </a:p>
           <a:p xmlns:a="http://schemas.openxmlformats.org/drawingml/2006/main">
@@ -1098,7 +1098,7 @@
           </a:p>
           <a:p xmlns:a="http://schemas.openxmlformats.org/drawingml/2006/main">
             <a:r>
-              <a:t>Vyberte způsob odevzdání předem. Odpověď použijte jako diagnostiku pro začátek další hodiny; nehodnoťte pouze formální správnost, ale konkrétnost a zdůvodnění.</a:t>
+              <a:t>Vyber způsob odevzdání předem. Odpověď použij jako diagnostiku pro začátek další hodiny; nehodnoť pouze formální správnost, ale konkrétnost a zdůvodnění.</a:t>
             </a:r>
           </a:p>
         </p:txBody>

--- a/public/materialy/1L/7/Prezentace k hodinám/4. Šifrování, HTTPS, hash a zálohy.pptx
+++ b/public/materialy/1L/7/Prezentace k hodinám/4. Šifrování, HTTPS, hash a zálohy.pptx
@@ -543,22 +543,22 @@
           <a:lstStyle xmlns:a="http://schemas.openxmlformats.org/drawingml/2006/main"/>
           <a:p xmlns:a="http://schemas.openxmlformats.org/drawingml/2006/main">
             <a:r>
-              <a:t>Výukový cíl: Student odliší šifrování od hashe, vysvětlí význam HTTPS a ověří integritu dvou souborů pomocí SHA‑256.</a:t>
-            </a:r>
-          </a:p>
-          <a:p xmlns:a="http://schemas.openxmlformats.org/drawingml/2006/main">
-            <a:r>
-              <a:t>Soubory: Složka Podklady k aktivitám, PowerShell, digitální pracovní sešit</a:t>
-            </a:r>
-          </a:p>
-          <a:p xmlns:a="http://schemas.openxmlformats.org/drawingml/2006/main">
-            <a:r>
-              <a:t>Výstup: Dva vypočtené hashe, vysvětlení rozdílu a vlastní vícevrstvý plán záloh.</a:t>
-            </a:r>
-          </a:p>
-          <a:p xmlns:a="http://schemas.openxmlformats.org/drawingml/2006/main">
-            <a:r>
-              <a:t>Před otevřením dalšího snímku stručně uveď téma a nech studenty připravit pracovní soubory.</a:t>
+              <a:t>Výukový cíl: Student odliší šifrování od hashe, vysvětlí význam HTTPS a ověří integritu dvou souborů pomocí SHA‑256.</a:t>
+            </a:r>
+          </a:p>
+          <a:p xmlns:a="http://schemas.openxmlformats.org/drawingml/2006/main">
+            <a:r>
+              <a:t>Soubory: Složka Podklady k aktivitám, PowerShell, digitální pracovní sešit</a:t>
+            </a:r>
+          </a:p>
+          <a:p xmlns:a="http://schemas.openxmlformats.org/drawingml/2006/main">
+            <a:r>
+              <a:t>Výstup: Dva vypočtené hashe, vysvětlení rozdílu a vlastní vícevrstvý plán záloh.</a:t>
+            </a:r>
+          </a:p>
+          <a:p xmlns:a="http://schemas.openxmlformats.org/drawingml/2006/main">
+            <a:r>
+              <a:t>Před otevřením dalšího snímku stručně uveď téma a nech studenty připravit pracovní soubory.</a:t>
             </a:r>
           </a:p>
         </p:txBody>
@@ -633,17 +633,17 @@
           </a:p>
           <a:p xmlns:a="http://schemas.openxmlformats.org/drawingml/2006/main">
             <a:r>
-              <a:t>Činnost: Pohlednice, obálka a pečeť.</a:t>
-            </a:r>
-          </a:p>
-          <a:p xmlns:a="http://schemas.openxmlformats.org/drawingml/2006/main">
-            <a:r>
-              <a:t>Postup učitele: Nech studenty přiřadit otevřený text, šifrovaný obsah a kontrolní otisk.</a:t>
-            </a:r>
-          </a:p>
-          <a:p xmlns:a="http://schemas.openxmlformats.org/drawingml/2006/main">
-            <a:r>
-              <a:t>Otázka pro studenty: Jak poznáš, že se soubor změnil, i když má stejný název?</a:t>
+              <a:t>Činnost: Pohlednice, obálka a pečeť.</a:t>
+            </a:r>
+          </a:p>
+          <a:p xmlns:a="http://schemas.openxmlformats.org/drawingml/2006/main">
+            <a:r>
+              <a:t>Postup učitele: Nech studenty přiřadit otevřený text, šifrovaný obsah a kontrolní otisk.</a:t>
+            </a:r>
+          </a:p>
+          <a:p xmlns:a="http://schemas.openxmlformats.org/drawingml/2006/main">
+            <a:r>
+              <a:t>Otázka pro studenty: Jak poznáš, že se soubor změnil, i když má stejný název?</a:t>
             </a:r>
           </a:p>
           <a:p xmlns:a="http://schemas.openxmlformats.org/drawingml/2006/main">
@@ -728,17 +728,17 @@
           </a:p>
           <a:p xmlns:a="http://schemas.openxmlformats.org/drawingml/2006/main">
             <a:r>
-              <a:t>Postup učitele: Odliš důvěrnost, integritu a dostupnost.</a:t>
-            </a:r>
-          </a:p>
-          <a:p xmlns:a="http://schemas.openxmlformats.org/drawingml/2006/main">
-            <a:r>
-              <a:t>Klíčové závěry: Šifrování: Mění čitelná data na podobu, kterou lze s odpovídajícím klíčem obnovit. | Hash: Jednosměrný otisk pro kontrolu shody nebo změny; není určen k dešifrování původního obsahu. | HTTPS: Chrání přenos mezi prohlížečem a konkrétní doménou; nezaručuje pravdivost či poctivost obsahu.</a:t>
-            </a:r>
-          </a:p>
-          <a:p xmlns:a="http://schemas.openxmlformats.org/drawingml/2006/main">
-            <a:r>
-              <a:t>Nech studenty doplnit příklad ke každému bodu. Přechod k aktivitě proveď otázkou: Jak tyto tři body použijeme na dnešní soubor?</a:t>
+              <a:t>Postup učitele: Odliš důvěrnost, integritu a dostupnost.</a:t>
+            </a:r>
+          </a:p>
+          <a:p xmlns:a="http://schemas.openxmlformats.org/drawingml/2006/main">
+            <a:r>
+              <a:t>Klíčové závěry: Šifrování: Mění čitelná data na podobu, kterou lze s odpovídajícím klíčem obnovit. | Hash: Jednosměrný otisk pro kontrolu shody nebo změny; není určen k dešifrování původního obsahu. | HTTPS: Chrání přenos mezi prohlížečem a konkrétní doménou; nezaručuje pravdivost či poctivost obsahu.</a:t>
+            </a:r>
+          </a:p>
+          <a:p xmlns:a="http://schemas.openxmlformats.org/drawingml/2006/main">
+            <a:r>
+              <a:t>Nech studenty doplnit příklad ke každému bodu. Přechod k aktivitě proveď otázkou: Jak tyto tři body použijeme na dnešní soubor?</a:t>
             </a:r>
           </a:p>
         </p:txBody>
@@ -808,12 +808,12 @@
           <a:lstStyle xmlns:a="http://schemas.openxmlformats.org/drawingml/2006/main"/>
           <a:p xmlns:a="http://schemas.openxmlformats.org/drawingml/2006/main">
             <a:r>
-              <a:t>Hlavní aktivita využívá: Složka Podklady k aktivitám, PowerShell, digitální pracovní sešit</a:t>
-            </a:r>
-          </a:p>
-          <a:p xmlns:a="http://schemas.openxmlformats.org/drawingml/2006/main">
-            <a:r>
-              <a:t>13–22 min – Model jednoduché šifry: Dvojice zašifrují a obnoví slovo; ihned vysvětli slabost modelu.</a:t>
+              <a:t>Hlavní aktivita využívá: Složka Podklady k aktivitám, PowerShell, digitální pracovní sešit</a:t>
+            </a:r>
+          </a:p>
+          <a:p xmlns:a="http://schemas.openxmlformats.org/drawingml/2006/main">
+            <a:r>
+              <a:t>13–22 min – Model jednoduché šifry: Dvojice zašifrují a obnoví slovo; ihned vysvětli slabost modelu.</a:t>
             </a:r>
           </a:p>
           <a:p xmlns:a="http://schemas.openxmlformats.org/drawingml/2006/main">
@@ -823,22 +823,22 @@
           </a:p>
           <a:p xmlns:a="http://schemas.openxmlformats.org/drawingml/2006/main">
             <a:r>
-              <a:t>31–39 min – Get-FileHash: Studenti porovnají SHA‑256 souborů 4. Kontrola integrity - projekt A.txt a 4. Kontrola integrity - projekt B.txt.</a:t>
-            </a:r>
-          </a:p>
-          <a:p xmlns:a="http://schemas.openxmlformats.org/drawingml/2006/main">
-            <a:r>
-              <a:t>39–42 min – Plán záloh: Požaduj oddělené kopie a ověření obnovitelnosti.</a:t>
-            </a:r>
-          </a:p>
-          <a:p xmlns:a="http://schemas.openxmlformats.org/drawingml/2006/main">
-            <a:r>
-              <a:t>Požadovaný výstup: Dva vypočtené hashe, vysvětlení rozdílu a vlastní vícevrstvý plán záloh.</a:t>
-            </a:r>
-          </a:p>
-          <a:p xmlns:a="http://schemas.openxmlformats.org/drawingml/2006/main">
-            <a:r>
-              <a:t>Během práce nepřebírej myš za studenta. Pomáhej otázkami z dalšího snímku a žádej, aby každé rozhodnutí opřel o konkrétní znak nebo zdroj.</a:t>
+              <a:t>31–39 min – Get-FileHash: Studenti porovnají SHA‑256 souborů 4. Kontrola integrity - projekt A.txt a 4. Kontrola integrity - projekt B.txt.</a:t>
+            </a:r>
+          </a:p>
+          <a:p xmlns:a="http://schemas.openxmlformats.org/drawingml/2006/main">
+            <a:r>
+              <a:t>39–42 min – Plán záloh: Požaduj oddělené kopie a ověření obnovitelnosti.</a:t>
+            </a:r>
+          </a:p>
+          <a:p xmlns:a="http://schemas.openxmlformats.org/drawingml/2006/main">
+            <a:r>
+              <a:t>Požadovaný výstup: Dva vypočtené hashe, vysvětlení rozdílu a vlastní vícevrstvý plán záloh.</a:t>
+            </a:r>
+          </a:p>
+          <a:p xmlns:a="http://schemas.openxmlformats.org/drawingml/2006/main">
+            <a:r>
+              <a:t>Během práce nepřebírej myš za studenta. Pomáhej otázkami z dalšího snímku a žádej, aby každé rozhodnutí opřel o konkrétní znak nebo zdroj.</a:t>
             </a:r>
           </a:p>
         </p:txBody>
@@ -908,12 +908,12 @@
           <a:lstStyle xmlns:a="http://schemas.openxmlformats.org/drawingml/2006/main"/>
           <a:p xmlns:a="http://schemas.openxmlformats.org/drawingml/2006/main">
             <a:r>
-              <a:t>Kritérium úspěchu: Student správně popíše, co rozdílný hash dokazuje a co z něj nelze zjistit.</a:t>
-            </a:r>
-          </a:p>
-          <a:p xmlns:a="http://schemas.openxmlformats.org/drawingml/2006/main">
-            <a:r>
-              <a:t>Vodicí otázky: Jaký problém řeší šifrování a jaký hash? | Co přesně znamená zámek v adresním řádku a co neznamená? | Proč dvě stejně dlouhé verze souboru mohou mít zcela jiný hash?</a:t>
+              <a:t>Kritérium úspěchu: Student správně popíše, co rozdílný hash dokazuje a co z něj nelze zjistit.</a:t>
+            </a:r>
+          </a:p>
+          <a:p xmlns:a="http://schemas.openxmlformats.org/drawingml/2006/main">
+            <a:r>
+              <a:t>Vodicí otázky: Jaký problém řeší šifrování a jaký hash? | Co přesně znamená zámek v adresním řádku a co neznamená? | Proč dvě stejně dlouhé verze souboru mohou mít zcela jiný hash?</a:t>
             </a:r>
           </a:p>
           <a:p xmlns:a="http://schemas.openxmlformats.org/drawingml/2006/main">
@@ -923,12 +923,12 @@
           </a:p>
           <a:p xmlns:a="http://schemas.openxmlformats.org/drawingml/2006/main">
             <a:r>
-              <a:t>Rozšíření: Studenti upraví v kopii jeden znak a sledují změnu hashe; vysvětlí lavinový efekt bez matematických detailů.</a:t>
-            </a:r>
-          </a:p>
-          <a:p xmlns:a="http://schemas.openxmlformats.org/drawingml/2006/main">
-            <a:r>
-              <a:t>Pro rychlou mezikontrolu nech dvojice vyměnit výstup a označit jeden dobře doložený bod a jednu otázku, která ještě zůstává.</a:t>
+              <a:t>Rozšíření: Studenti upraví v kopii jeden znak a sledují změnu hashe; vysvětlí lavinový efekt bez matematických detailů.</a:t>
+            </a:r>
+          </a:p>
+          <a:p xmlns:a="http://schemas.openxmlformats.org/drawingml/2006/main">
+            <a:r>
+              <a:t>Pro rychlou mezikontrolu nech dvojice vyměnit výstup a označit jeden dobře doložený bod a jednu otázku, která ještě zůstává.</a:t>
             </a:r>
           </a:p>
         </p:txBody>
@@ -998,17 +998,17 @@
           <a:lstStyle xmlns:a="http://schemas.openxmlformats.org/drawingml/2006/main"/>
           <a:p xmlns:a="http://schemas.openxmlformats.org/drawingml/2006/main">
             <a:r>
-              <a:t>Očekávané závěry: Šifrování: Mění čitelná data na podobu, kterou lze s odpovídajícím klíčem obnovit. | Hash: Jednosměrný otisk pro kontrolu shody nebo změny; není určen k dešifrování původního obsahu. | HTTPS: Chrání přenos mezi prohlížečem a konkrétní doménou; nezaručuje pravdivost či poctivost obsahu. | SHA‑256: Soubory mají rozdílné hashe, protože se liší částka rozpočtu; hash sám neřekne, která verze je správná. | Záloha: Pracovní kopie plus nejméně dvě oddělené kopie na různých místech nebo typech úložiště; obnova musí být vyzkoušená.</a:t>
-            </a:r>
-          </a:p>
-          <a:p xmlns:a="http://schemas.openxmlformats.org/drawingml/2006/main">
-            <a:r>
-              <a:t>Časté chyby a intervence: „Hash lze dešifrovat.“ → Vrať se k rozdílu mezi vratnou transformací s klíčem a jednosměrným otiskem. | „Stejný název znamená stejný soubor.“ → Porovnávej obsah pomocí hashe, nikoli pouze název, velikost nebo ikonu. | „Cloudová synchronizace je vždy záloha.“ → Synchronizace může přenést smazání či poškození; důležitá je historie verzí a oddělená kopie.</a:t>
-            </a:r>
-          </a:p>
-          <a:p xmlns:a="http://schemas.openxmlformats.org/drawingml/2006/main">
-            <a:r>
-              <a:t>Nečti celý klíč. Vyber dva studentské postupy, které vedou k odlišným závěrům, a nech třídu určit, který je lépe podložený.</a:t>
+              <a:t>Očekávané závěry: Šifrování: Mění čitelná data na podobu, kterou lze s odpovídajícím klíčem obnovit. | Hash: Jednosměrný otisk pro kontrolu shody nebo změny; není určen k dešifrování původního obsahu. | HTTPS: Chrání přenos mezi prohlížečem a konkrétní doménou; nezaručuje pravdivost či poctivost obsahu. | SHA‑256: Soubory mají rozdílné hashe, protože se liší částka rozpočtu; hash sám neřekne, která verze je správná. | Záloha: Pracovní kopie plus nejméně dvě oddělené kopie na různých místech nebo typech úložiště; obnova musí být vyzkoušená.</a:t>
+            </a:r>
+          </a:p>
+          <a:p xmlns:a="http://schemas.openxmlformats.org/drawingml/2006/main">
+            <a:r>
+              <a:t>Časté chyby a intervence: „Hash lze dešifrovat.“ → Vrať se k rozdílu mezi vratnou transformací s klíčem a jednosměrným otiskem. | „Stejný název znamená stejný soubor.“ → Porovnávej obsah pomocí hashe, nikoli pouze název, velikost nebo ikonu. | „Cloudová synchronizace je vždy záloha.“ → Synchronizace může přenést smazání či poškození; důležitá je historie verzí a oddělená kopie.</a:t>
+            </a:r>
+          </a:p>
+          <a:p xmlns:a="http://schemas.openxmlformats.org/drawingml/2006/main">
+            <a:r>
+              <a:t>Nečti celý klíč. Vyber dva studentské postupy, které vedou k odlišným závěrům, a nech třídu určit, který je lépe podložený.</a:t>
             </a:r>
           </a:p>
         </p:txBody>
@@ -1088,17 +1088,17 @@
           </a:p>
           <a:p xmlns:a="http://schemas.openxmlformats.org/drawingml/2006/main">
             <a:r>
-              <a:t>Rozšíření: Studenti upraví v kopii jeden znak a sledují změnu hashe; vysvětlí lavinový efekt bez matematických detailů.</a:t>
-            </a:r>
-          </a:p>
-          <a:p xmlns:a="http://schemas.openxmlformats.org/drawingml/2006/main">
-            <a:r>
-              <a:t>Když technika selže: Pokud je PowerShell blokovaný, hash vypočítá učitel na projekci a studenti interpretují dva výsledky.</a:t>
-            </a:r>
-          </a:p>
-          <a:p xmlns:a="http://schemas.openxmlformats.org/drawingml/2006/main">
-            <a:r>
-              <a:t>Vyber způsob odevzdání předem. Odpověď použij jako diagnostiku pro začátek další hodiny; nehodnoť pouze formální správnost, ale konkrétnost a zdůvodnění.</a:t>
+              <a:t>Rozšíření: Studenti upraví v kopii jeden znak a sledují změnu hashe; vysvětlí lavinový efekt bez matematických detailů.</a:t>
+            </a:r>
+          </a:p>
+          <a:p xmlns:a="http://schemas.openxmlformats.org/drawingml/2006/main">
+            <a:r>
+              <a:t>Když technika selže: Pokud je PowerShell blokovaný, hash vypočítá učitel na projekci a studenti interpretují dva výsledky.</a:t>
+            </a:r>
+          </a:p>
+          <a:p xmlns:a="http://schemas.openxmlformats.org/drawingml/2006/main">
+            <a:r>
+              <a:t>Vyber způsob odevzdání předem. Odpověď použij jako diagnostiku pro začátek další hodiny; nehodnoť pouze formální správnost, ale konkrétnost a zdůvodnění.</a:t>
             </a:r>
           </a:p>
         </p:txBody>
@@ -1829,7 +1829,7 @@
             </a:pPr>
             <a:r>
               <a:t>INTERNET, BEZPEČNOST
-A PRÁCE S INFORMACEMI</a:t>
+A PRÁCE S INFORMACEMI</a:t>
             </a:r>
           </a:p>
         </p:txBody>
@@ -1874,7 +1874,7 @@
               </a:defRPr>
             </a:pPr>
             <a:r>
-              <a:t>Šifrování, HTTPS, hash a zálohování</a:t>
+              <a:t>Šifrování, HTTPS, hash a zálohování</a:t>
             </a:r>
           </a:p>
         </p:txBody>
@@ -1919,7 +1919,7 @@
               </a:defRPr>
             </a:pPr>
             <a:r>
-              <a:t>Student odliší šifrování od hashe, vysvětlí význam HTTPS a ověří integritu dvou souborů pomocí SHA‑256.</a:t>
+              <a:t>Student odliší šifrování od hashe, vysvětlí význam HTTPS a ověří integritu dvou souborů pomocí SHA‑256.</a:t>
             </a:r>
           </a:p>
         </p:txBody>
@@ -2327,7 +2327,7 @@
               </a:defRPr>
             </a:pPr>
             <a:r>
-              <a:t>Jak poznáš, že se soubor změnil, i když má stejný název?</a:t>
+              <a:t>Jak poznáš, že se soubor změnil, i když má stejný název?</a:t>
             </a:r>
           </a:p>
         </p:txBody>
@@ -3003,7 +3003,7 @@
               </a:defRPr>
             </a:pPr>
             <a:r>
-              <a:t>Šifrování chrání čitelnost dat. S odpovídajícím klíčem lze původní obsah znovu obnovit.</a:t>
+              <a:t>Šifrování chrání čitelnost dat. S odpovídajícím klíčem lze původní obsah znovu obnovit.</a:t>
             </a:r>
           </a:p>
         </p:txBody>
@@ -3138,7 +3138,7 @@
               </a:defRPr>
             </a:pPr>
             <a:r>
-              <a:t>Hash je jednosměrný otisk pro kontrolu shody nebo změny. Není určen k dešifrování.</a:t>
+              <a:t>Hash je jednosměrný otisk pro kontrolu shody nebo změny. Není určen k dešifrování.</a:t>
             </a:r>
           </a:p>
         </p:txBody>
@@ -3273,7 +3273,7 @@
               </a:defRPr>
             </a:pPr>
             <a:r>
-              <a:t>Záloha musí být oddělená a obnovitelná. Pouhá synchronizace nemusí stačit.</a:t>
+              <a:t>Záloha musí být oddělená a obnovitelná. Pouhá synchronizace nemusí stačit.</a:t>
             </a:r>
           </a:p>
         </p:txBody>
@@ -3349,7 +3349,7 @@
               </a:defRPr>
             </a:pPr>
             <a:r>
-              <a:t>Nejde o rychlý tip. Jde o postup, který lze vysvětlit a zopakovat.</a:t>
+              <a:t>Nejde o rychlý tip. Jde o postup, který lze vysvětlit a zopakovat.</a:t>
             </a:r>
           </a:p>
         </p:txBody>
@@ -3679,7 +3679,7 @@
               </a:defRPr>
             </a:pPr>
             <a:r>
-              <a:t>Složka Podklady k aktivitám, PowerShell, digitální pracovní sešit</a:t>
+              <a:t>Složka Podklady k aktivitám, PowerShell, digitální pracovní sešit</a:t>
             </a:r>
           </a:p>
         </p:txBody>
@@ -3845,7 +3845,7 @@
               </a:defRPr>
             </a:pPr>
             <a:r>
-              <a:t>Zašifruj a obnov krátké slovo. Potom vysvětli, proč je tento model slabý.</a:t>
+              <a:t>Zašifruj a obnov krátké slovo. Potom vysvětli, proč je tento model slabý.</a:t>
             </a:r>
           </a:p>
         </p:txBody>
@@ -4011,7 +4011,7 @@
               </a:defRPr>
             </a:pPr>
             <a:r>
-              <a:t>Spusť Get-FileHash pro 4. Kontrola integrity - projekt A.txt a 4. Kontrola integrity - projekt B.txt a porovnej výsledky.</a:t>
+              <a:t>Spusť Get-FileHash pro 4. Kontrola integrity - projekt A.txt a 4. Kontrola integrity - projekt B.txt a porovnej výsledky.</a:t>
             </a:r>
           </a:p>
         </p:txBody>
@@ -4177,7 +4177,7 @@
               </a:defRPr>
             </a:pPr>
             <a:r>
-              <a:t>Uveď pracovní kopii a dvě oddělené kopie. Doplň, jak ověříš obnovení.</a:t>
+              <a:t>Uveď pracovní kopii a dvě oddělené kopie. Doplň, jak ověříš obnovení.</a:t>
             </a:r>
           </a:p>
         </p:txBody>
@@ -4267,7 +4267,7 @@
               </a:defRPr>
             </a:pPr>
             <a:r>
-              <a:t>Dva vypočtené hashe, vysvětlení rozdílu a vlastní vícevrstvý plán záloh.</a:t>
+              <a:t>Dva vypočtené hashe, vysvětlení rozdílu a vlastní vícevrstvý plán záloh.</a:t>
             </a:r>
           </a:p>
         </p:txBody>
@@ -4673,7 +4673,7 @@
               </a:defRPr>
             </a:pPr>
             <a:r>
-              <a:t>Student správně popíše, co rozdílný hash dokazuje a co z něj nelze zjistit.</a:t>
+              <a:t>Student správně popíše, co rozdílný hash dokazuje a co z něj nelze zjistit.</a:t>
             </a:r>
           </a:p>
         </p:txBody>
@@ -4839,7 +4839,7 @@
               </a:defRPr>
             </a:pPr>
             <a:r>
-              <a:t>Jaký problém řeší šifrování a jaký hash?</a:t>
+              <a:t>Jaký problém řeší šifrování a jaký hash?</a:t>
             </a:r>
           </a:p>
         </p:txBody>
@@ -5005,7 +5005,7 @@
               </a:defRPr>
             </a:pPr>
             <a:r>
-              <a:t>Co přesně znamená zámek v adresním řádku a co neznamená?</a:t>
+              <a:t>Co přesně znamená zámek v adresním řádku a co neznamená?</a:t>
             </a:r>
           </a:p>
         </p:txBody>
@@ -5546,7 +5546,7 @@
               </a:defRPr>
             </a:pPr>
             <a:r>
-              <a:t>Mění čitelná data na podobu, kterou lze s odpovídajícím klíčem obnovit.</a:t>
+              <a:t>Mění čitelná data na podobu, kterou lze s odpovídajícím klíčem obnovit.</a:t>
             </a:r>
           </a:p>
         </p:txBody>
@@ -5636,7 +5636,7 @@
               </a:defRPr>
             </a:pPr>
             <a:r>
-              <a:t>Jednosměrný otisk pro kontrolu shody nebo změny; není určen k dešifrování původního obsahu.</a:t>
+              <a:t>Jednosměrný otisk pro kontrolu shody nebo změny; není určen k dešifrování původního obsahu.</a:t>
             </a:r>
           </a:p>
         </p:txBody>
@@ -5726,7 +5726,7 @@
               </a:defRPr>
             </a:pPr>
             <a:r>
-              <a:t>Chrání přenos mezi prohlížečem a konkrétní doménou; nezaručuje pravdivost či poctivost obsahu.</a:t>
+              <a:t>Chrání přenos mezi prohlížečem a konkrétní doménou; nezaručuje pravdivost či poctivost obsahu.</a:t>
             </a:r>
           </a:p>
         </p:txBody>
@@ -5892,7 +5892,7 @@
               </a:defRPr>
             </a:pPr>
             <a:r>
-              <a:t>Vraťte se k rozdílu mezi vratnou transformací s klíčem a jednosměrným otiskem.</a:t>
+              <a:t>Vraťte se k rozdílu mezi vratnou transformací s klíčem a jednosměrným otiskem.</a:t>
             </a:r>
           </a:p>
         </p:txBody>
@@ -5937,7 +5937,7 @@
               </a:defRPr>
             </a:pPr>
             <a:r>
-              <a:t>Vrať se k úvodnímu rozhodnutí. Co bys teď změnil — a proč?</a:t>
+              <a:t>Vrať se k úvodnímu rozhodnutí. Co bys teď změnil — a proč?</a:t>
             </a:r>
           </a:p>
         </p:txBody>
